--- a/p04/A-frame-moving-geometric-objects.pptx
+++ b/p04/A-frame-moving-geometric-objects.pptx
@@ -9167,7 +9167,7 @@
         </p:blipFill>
         <p:spPr>
           <a:xfrm>
-            <a:off x="1682068" y="1758045"/>
+            <a:off x="1786076" y="3110144"/>
             <a:ext cx="7830669" cy="1792230"/>
           </a:xfrm>
           <a:prstGeom prst="rect">
@@ -9189,7 +9189,7 @@
         </p:nvCxnSpPr>
         <p:spPr>
           <a:xfrm flipH="1">
-            <a:off x="8847786" y="1529411"/>
+            <a:off x="8951794" y="2881510"/>
             <a:ext cx="746975" cy="815662"/>
           </a:xfrm>
           <a:prstGeom prst="straightConnector1">
@@ -9230,7 +9230,7 @@
         </p:nvCxnSpPr>
         <p:spPr>
           <a:xfrm flipV="1">
-            <a:off x="6357871" y="2654160"/>
+            <a:off x="6461879" y="4006259"/>
             <a:ext cx="283335" cy="913069"/>
           </a:xfrm>
           <a:prstGeom prst="straightConnector1">
@@ -9756,7 +9756,19 @@
             </a:pPr>
             <a:r>
               <a:rPr lang="en-US" dirty="0"/>
-              <a:t>&lt;a-box  id="PGB box" position="0 2 -2.5" rotation="45 45 45" 		color="green"</a:t>
+              <a:t>&lt;a-box  id="PGB box" position="0 2 -2.5" </a:t>
+            </a:r>
+            <a:r>
+              <a:rPr lang="en-US" dirty="0">
+                <a:solidFill>
+                  <a:schemeClr val="accent1"/>
+                </a:solidFill>
+              </a:rPr>
+              <a:t>rotation</a:t>
+            </a:r>
+            <a:r>
+              <a:rPr lang="en-US" dirty="0"/>
+              <a:t>="45 45 45" 		color="green"</a:t>
             </a:r>
           </a:p>
           <a:p>
